--- a/present/Traffic.pptx
+++ b/present/Traffic.pptx
@@ -8249,7 +8249,9 @@
         </p:nvSpPr>
         <p:spPr/>
         <p:txBody>
-          <a:bodyPr/>
+          <a:bodyPr>
+            <a:normAutofit lnSpcReduction="10000"/>
+          </a:bodyPr>
           <a:lstStyle/>
           <a:p>
             <a:r>
@@ -8272,7 +8274,23 @@
           <a:p>
             <a:r>
               <a:rPr lang="en-US" dirty="0"/>
-              <a:t>This presentation covers a comprehensive implementation of traffic sign recognition using CNN with Keras which is a part of ASDS.</a:t>
+              <a:t>This presentation covers a comprehensive implementation of traffic sign recognition using CNN with Keras which is a part of </a:t>
+            </a:r>
+            <a:r>
+              <a:rPr lang="en-US" b="1" dirty="0"/>
+              <a:t>Advanced driver-assistance systems</a:t>
+            </a:r>
+            <a:r>
+              <a:rPr lang="en-US" dirty="0"/>
+              <a:t> (</a:t>
+            </a:r>
+            <a:r>
+              <a:rPr lang="en-US" b="1" dirty="0"/>
+              <a:t>ADAS</a:t>
+            </a:r>
+            <a:r>
+              <a:rPr lang="en-US" dirty="0"/>
+              <a:t>)</a:t>
             </a:r>
           </a:p>
         </p:txBody>
@@ -11114,7 +11132,7 @@
         </p:blipFill>
         <p:spPr>
           <a:xfrm>
-            <a:off x="2389093" y="768485"/>
+            <a:off x="2359910" y="768485"/>
             <a:ext cx="6443621" cy="4533065"/>
           </a:xfrm>
           <a:prstGeom prst="rect">
